--- a/builder/assets/reference-pages/gantt-dependency.pptx
+++ b/builder/assets/reference-pages/gantt-dependency.pptx
@@ -1097,7 +1097,7 @@
                   <a:srgbClr val="15375F"/>
                 </a:solidFill>
               </a:rPr>
-              <a:t>18 个月计划有 6 项关键路径任务，其中 3 项存在延期风险</a:t>
+              <a:t>18 Monthly plan has 6 critical path tasks, of which 3 There is a risk of delay in the project</a:t>
             </a:r>
           </a:p>
         </p:txBody>
@@ -1263,7 +1263,7 @@
                   <a:srgbClr val="15375F"/>
                 </a:solidFill>
               </a:rPr>
-              <a:t>业务</a:t>
+              <a:t>business</a:t>
             </a:r>
           </a:p>
         </p:txBody>
@@ -1359,7 +1359,7 @@
                   <a:srgbClr val="15375F"/>
                 </a:solidFill>
               </a:rPr>
-              <a:t>技术</a:t>
+              <a:t>Technology</a:t>
             </a:r>
           </a:p>
         </p:txBody>
@@ -1455,7 +1455,7 @@
                   <a:srgbClr val="15375F"/>
                 </a:solidFill>
               </a:rPr>
-              <a:t>数据</a:t>
+              <a:t>data</a:t>
             </a:r>
           </a:p>
         </p:txBody>
@@ -1551,7 +1551,7 @@
                   <a:srgbClr val="15375F"/>
                 </a:solidFill>
               </a:rPr>
-              <a:t>变革管理</a:t>
+              <a:t>change management</a:t>
             </a:r>
           </a:p>
         </p:txBody>
@@ -3090,7 +3090,7 @@
                   <a:srgbClr val="E8872D"/>
                 </a:solidFill>
               </a:rPr>
-              <a:t>业务蓝图</a:t>
+              <a:t>business blueprint</a:t>
             </a:r>
           </a:p>
         </p:txBody>
@@ -3144,7 +3144,7 @@
                   <a:srgbClr val="FFFFFF"/>
                 </a:solidFill>
               </a:rPr>
-              <a:t>100%｜陈总</a:t>
+              <a:t>100%｜Mr. Chen</a:t>
             </a:r>
           </a:p>
         </p:txBody>
@@ -3194,7 +3194,7 @@
                   <a:srgbClr val="E8872D"/>
                 </a:solidFill>
               </a:rPr>
-              <a:t>流程设计</a:t>
+              <a:t>process design</a:t>
             </a:r>
           </a:p>
         </p:txBody>
@@ -3248,7 +3248,7 @@
                   <a:srgbClr val="FFFFFF"/>
                 </a:solidFill>
               </a:rPr>
-              <a:t>70%｜李经理</a:t>
+              <a:t>70%｜Manager Li</a:t>
             </a:r>
           </a:p>
         </p:txBody>
@@ -3298,7 +3298,7 @@
                   <a:srgbClr val="172033"/>
                 </a:solidFill>
               </a:rPr>
-              <a:t>平台选型</a:t>
+              <a:t>Platform selection</a:t>
             </a:r>
           </a:p>
         </p:txBody>
@@ -3352,7 +3352,7 @@
                   <a:srgbClr val="FFFFFF"/>
                 </a:solidFill>
               </a:rPr>
-              <a:t>100%｜王经理</a:t>
+              <a:t>100%｜Manager Wang</a:t>
             </a:r>
           </a:p>
         </p:txBody>
@@ -3402,7 +3402,7 @@
                   <a:srgbClr val="E8872D"/>
                 </a:solidFill>
               </a:rPr>
-              <a:t>核心开发</a:t>
+              <a:t>core development</a:t>
             </a:r>
           </a:p>
         </p:txBody>
@@ -3456,7 +3456,7 @@
                   <a:srgbClr val="FFFFFF"/>
                 </a:solidFill>
               </a:rPr>
-              <a:t>45%｜赵经理</a:t>
+              <a:t>45%｜Manager Zhao</a:t>
             </a:r>
           </a:p>
         </p:txBody>
@@ -3506,7 +3506,7 @@
                   <a:srgbClr val="E8872D"/>
                 </a:solidFill>
               </a:rPr>
-              <a:t>接口联调</a:t>
+              <a:t>Interface joint debugging</a:t>
             </a:r>
           </a:p>
         </p:txBody>
@@ -3560,7 +3560,7 @@
                   <a:srgbClr val="FFFFFF"/>
                 </a:solidFill>
               </a:rPr>
-              <a:t>10%｜赵经理</a:t>
+              <a:t>10%｜Manager Zhao</a:t>
             </a:r>
           </a:p>
         </p:txBody>
@@ -3610,7 +3610,7 @@
                   <a:srgbClr val="E8872D"/>
                 </a:solidFill>
               </a:rPr>
-              <a:t>主数据治理</a:t>
+              <a:t>Master data governance</a:t>
             </a:r>
           </a:p>
         </p:txBody>
@@ -3664,7 +3664,7 @@
                   <a:srgbClr val="FFFFFF"/>
                 </a:solidFill>
               </a:rPr>
-              <a:t>60%｜周经理</a:t>
+              <a:t>60%｜Manager Zhou</a:t>
             </a:r>
           </a:p>
         </p:txBody>
@@ -3714,7 +3714,7 @@
                   <a:srgbClr val="E8872D"/>
                 </a:solidFill>
               </a:rPr>
-              <a:t>数据迁移</a:t>
+              <a:t>Data migration</a:t>
             </a:r>
           </a:p>
         </p:txBody>
@@ -3768,7 +3768,7 @@
                   <a:srgbClr val="FFFFFF"/>
                 </a:solidFill>
               </a:rPr>
-              <a:t>20%｜周经理</a:t>
+              <a:t>20%｜Manager Zhou</a:t>
             </a:r>
           </a:p>
         </p:txBody>
@@ -3818,7 +3818,7 @@
                   <a:srgbClr val="172033"/>
                 </a:solidFill>
               </a:rPr>
-              <a:t>试点培训</a:t>
+              <a:t>Pilot training</a:t>
             </a:r>
           </a:p>
         </p:txBody>
@@ -3872,7 +3872,7 @@
                   <a:srgbClr val="FFFFFF"/>
                 </a:solidFill>
               </a:rPr>
-              <a:t>0%｜孙经理</a:t>
+              <a:t>0%｜Manager Sun</a:t>
             </a:r>
           </a:p>
         </p:txBody>
@@ -3922,7 +3922,7 @@
                   <a:srgbClr val="E8872D"/>
                 </a:solidFill>
               </a:rPr>
-              <a:t>业务试点</a:t>
+              <a:t>Business pilot</a:t>
             </a:r>
           </a:p>
         </p:txBody>
@@ -3976,7 +3976,7 @@
                   <a:srgbClr val="FFFFFF"/>
                 </a:solidFill>
               </a:rPr>
-              <a:t>0%｜李经理</a:t>
+              <a:t>0%｜Manager Li</a:t>
             </a:r>
           </a:p>
         </p:txBody>
@@ -4026,7 +4026,7 @@
                   <a:srgbClr val="E8872D"/>
                 </a:solidFill>
               </a:rPr>
-              <a:t>全面推广</a:t>
+              <a:t>Comprehensive promotion</a:t>
             </a:r>
           </a:p>
         </p:txBody>
@@ -4080,7 +4080,7 @@
                   <a:srgbClr val="FFFFFF"/>
                 </a:solidFill>
               </a:rPr>
-              <a:t>0%｜孙经理</a:t>
+              <a:t>0%｜Manager Sun</a:t>
             </a:r>
           </a:p>
         </p:txBody>
@@ -4430,7 +4430,7 @@
                   <a:srgbClr val="15375F"/>
                 </a:solidFill>
               </a:rPr>
-              <a:t>关键路径</a:t>
+              <a:t>critical path</a:t>
             </a:r>
           </a:p>
         </p:txBody>
@@ -4486,7 +4486,7 @@
                   <a:srgbClr val="172033"/>
                 </a:solidFill>
               </a:rPr>
-              <a:t>关键路径总时长｜18 个月</a:t>
+              <a:t>total critical path duration｜18 months</a:t>
             </a:r>
           </a:p>
         </p:txBody>
@@ -4542,7 +4542,7 @@
                   <a:srgbClr val="172033"/>
                 </a:solidFill>
               </a:rPr>
-              <a:t>剩余浮动时间｜1 个月</a:t>
+              <a:t>remaining float｜1 months</a:t>
             </a:r>
           </a:p>
         </p:txBody>
@@ -4598,7 +4598,7 @@
                   <a:srgbClr val="172033"/>
                 </a:solidFill>
               </a:rPr>
-              <a:t>最可能延期｜接口联调、数据迁移、业务试点</a:t>
+              <a:t>most likely to be postponed｜Interface joint debugging, data migration, business pilot</a:t>
             </a:r>
           </a:p>
         </p:txBody>
@@ -4654,7 +4654,7 @@
                   <a:srgbClr val="15375F"/>
                 </a:solidFill>
               </a:rPr>
-              <a:t>优先锁定接口与数据资源，确保第 11 月试点不被关键路径拖延</a:t>
+              <a:t>Prioritize locking interfaces and data resources to ensure that 11 Monthly pilots are not delayed by the critical path</a:t>
             </a:r>
           </a:p>
         </p:txBody>
